--- a/download/ScreenWise-Pitch-Deck.pptx
+++ b/download/ScreenWise-Pitch-Deck.pptx
@@ -12088,7 +12088,7 @@
       </p:sp>
       <p:pic>
         <p:nvPicPr>
-          <p:cNvPr id="8" name="Image 0" descr="/tmp/h2p-fit-1781872528541-ilmi8g.png">    </p:cNvPr>
+          <p:cNvPr id="8" name="Image 0" descr="/tmp/h2p-fit-1781927718168-n2gab8.png">    </p:cNvPr>
           <p:cNvPicPr>
             <a:picLocks noChangeAspect="1"/>
           </p:cNvPicPr>
@@ -12208,7 +12208,7 @@
       </p:sp>
       <p:pic>
         <p:nvPicPr>
-          <p:cNvPr id="11" name="Image 1" descr="/tmp/h2p-fit-1781872528542-unxrfz.png">    </p:cNvPr>
+          <p:cNvPr id="11" name="Image 1" descr="/tmp/h2p-fit-1781927718171-kjsf8a.png">    </p:cNvPr>
           <p:cNvPicPr>
             <a:picLocks noChangeAspect="1"/>
           </p:cNvPicPr>
@@ -12328,7 +12328,7 @@
       </p:sp>
       <p:pic>
         <p:nvPicPr>
-          <p:cNvPr id="14" name="Image 2" descr="/tmp/h2p-fit-1781872528540-oxcuue.png">    </p:cNvPr>
+          <p:cNvPr id="14" name="Image 2" descr="/tmp/h2p-fit-1781927718170-hm73ks.png">    </p:cNvPr>
           <p:cNvPicPr>
             <a:picLocks noChangeAspect="1"/>
           </p:cNvPicPr>
@@ -12714,7 +12714,7 @@
                 <a:ea typeface="Courier New" pitchFamily="34" charset="-122"/>
                 <a:cs typeface="Courier New" pitchFamily="34" charset="-120"/>
               </a:rPr>
-              <a:t>preview-panel · / route</a:t>
+              <a:t>Preview Panel → / route (this app)</a:t>
             </a:r>
             <a:endParaRPr lang="en-US" sz="800" dirty="0"/>
           </a:p>
@@ -12860,7 +12860,7 @@
                 <a:ea typeface="Courier New" pitchFamily="34" charset="-122"/>
                 <a:cs typeface="Courier New" pitchFamily="34" charset="-120"/>
               </a:rPr>
-              <a:t>github.com/your-handle/screenwise</a:t>
+              <a:t>github.com/screenwise-ai/screenwise</a:t>
             </a:r>
             <a:endParaRPr lang="en-US" sz="800" dirty="0"/>
           </a:p>
